--- a/2 Topic Library/Component 2 - Algorithms and Programming/2.3 Algorithms/Year 13 - 2.3.1 Algorithms/1 Lesson.pptx
+++ b/2 Topic Library/Component 2 - Algorithms and Programming/2.3 Algorithms/Year 13 - 2.3.1 Algorithms/1 Lesson.pptx
@@ -3184,7 +3184,7 @@
                 </a:solidFill>
                 <a:latin typeface="Calibri"/>
               </a:rPr>
-              <a:t>Lesson deck — editable skeleton: adapt freely.</a:t>
+              <a:t>Editable lesson deck — adapt freely.</a:t>
             </a:r>
           </a:p>
         </p:txBody>
@@ -3273,7 +3273,7 @@
           <a:p>
             <a:pPr/>
             <a:r>
-              <a:rPr sz="2200" b="0">
+              <a:rPr sz="2000" b="0">
                 <a:solidFill>
                   <a:srgbClr val="222222"/>
                 </a:solidFill>
@@ -3285,7 +3285,7 @@
           <a:p>
             <a:pPr/>
             <a:r>
-              <a:rPr sz="2200" b="0">
+              <a:rPr sz="2000" b="0">
                 <a:solidFill>
                   <a:srgbClr val="222222"/>
                 </a:solidFill>
@@ -3297,7 +3297,7 @@
           <a:p>
             <a:pPr/>
             <a:r>
-              <a:rPr sz="2200" b="0">
+              <a:rPr sz="2000" b="0">
                 <a:solidFill>
                   <a:srgbClr val="222222"/>
                 </a:solidFill>
@@ -3309,7 +3309,7 @@
           <a:p>
             <a:pPr/>
             <a:r>
-              <a:rPr sz="2200" b="0">
+              <a:rPr sz="2000" b="0">
                 <a:solidFill>
                   <a:srgbClr val="222222"/>
                 </a:solidFill>
@@ -3321,7 +3321,7 @@
           <a:p>
             <a:pPr/>
             <a:r>
-              <a:rPr sz="2200" b="0">
+              <a:rPr sz="2000" b="0">
                 <a:solidFill>
                   <a:srgbClr val="222222"/>
                 </a:solidFill>
@@ -3416,7 +3416,7 @@
           <a:p>
             <a:pPr/>
             <a:r>
-              <a:rPr sz="2200" b="0">
+              <a:rPr sz="2000" b="0">
                 <a:solidFill>
                   <a:srgbClr val="222222"/>
                 </a:solidFill>
@@ -3428,7 +3428,7 @@
           <a:p>
             <a:pPr/>
             <a:r>
-              <a:rPr sz="2200" b="0">
+              <a:rPr sz="2000" b="0">
                 <a:solidFill>
                   <a:srgbClr val="222222"/>
                 </a:solidFill>
@@ -3440,7 +3440,7 @@
           <a:p>
             <a:pPr/>
             <a:r>
-              <a:rPr sz="2200" b="0">
+              <a:rPr sz="2000" b="0">
                 <a:solidFill>
                   <a:srgbClr val="222222"/>
                 </a:solidFill>
@@ -3452,7 +3452,7 @@
           <a:p>
             <a:pPr/>
             <a:r>
-              <a:rPr sz="2200" b="0">
+              <a:rPr sz="2000" b="0">
                 <a:solidFill>
                   <a:srgbClr val="222222"/>
                 </a:solidFill>
@@ -3464,7 +3464,7 @@
           <a:p>
             <a:pPr/>
             <a:r>
-              <a:rPr sz="2200" b="0">
+              <a:rPr sz="2000" b="0">
                 <a:solidFill>
                   <a:srgbClr val="222222"/>
                 </a:solidFill>
@@ -3571,7 +3571,7 @@
           <a:p>
             <a:pPr lvl="1"/>
             <a:r>
-              <a:rPr sz="2000" b="0">
+              <a:rPr sz="1900" b="0">
                 <a:solidFill>
                   <a:srgbClr val="222222"/>
                 </a:solidFill>
@@ -3583,7 +3583,7 @@
           <a:p>
             <a:pPr lvl="1"/>
             <a:r>
-              <a:rPr sz="2000" b="0">
+              <a:rPr sz="1900" b="0">
                 <a:solidFill>
                   <a:srgbClr val="222222"/>
                 </a:solidFill>
@@ -3595,7 +3595,7 @@
           <a:p>
             <a:pPr lvl="1"/>
             <a:r>
-              <a:rPr sz="2000" b="0">
+              <a:rPr sz="1900" b="0">
                 <a:solidFill>
                   <a:srgbClr val="222222"/>
                 </a:solidFill>
@@ -3607,7 +3607,7 @@
           <a:p>
             <a:pPr lvl="1"/>
             <a:r>
-              <a:rPr sz="2000" b="0">
+              <a:rPr sz="1900" b="0">
                 <a:solidFill>
                   <a:srgbClr val="222222"/>
                 </a:solidFill>
@@ -3619,7 +3619,7 @@
           <a:p>
             <a:pPr lvl="1"/>
             <a:r>
-              <a:rPr sz="2000" b="0">
+              <a:rPr sz="1900" b="0">
                 <a:solidFill>
                   <a:srgbClr val="222222"/>
                 </a:solidFill>
@@ -3631,7 +3631,7 @@
           <a:p>
             <a:pPr lvl="1"/>
             <a:r>
-              <a:rPr sz="2000" b="0">
+              <a:rPr sz="1900" b="0">
                 <a:solidFill>
                   <a:srgbClr val="222222"/>
                 </a:solidFill>
@@ -3643,7 +3643,7 @@
           <a:p>
             <a:pPr lvl="1"/>
             <a:r>
-              <a:rPr sz="2000" b="0">
+              <a:rPr sz="1900" b="0">
                 <a:solidFill>
                   <a:srgbClr val="222222"/>
                 </a:solidFill>
@@ -4847,7 +4847,7 @@
           <a:p>
             <a:pPr/>
             <a:r>
-              <a:rPr sz="2200" b="0">
+              <a:rPr sz="2000" b="0">
                 <a:solidFill>
                   <a:srgbClr val="222222"/>
                 </a:solidFill>
@@ -4859,7 +4859,7 @@
           <a:p>
             <a:pPr/>
             <a:r>
-              <a:rPr sz="2200" b="0">
+              <a:rPr sz="2000" b="0">
                 <a:solidFill>
                   <a:srgbClr val="222222"/>
                 </a:solidFill>
@@ -4871,7 +4871,7 @@
           <a:p>
             <a:pPr/>
             <a:r>
-              <a:rPr sz="2200" b="0">
+              <a:rPr sz="2000" b="0">
                 <a:solidFill>
                   <a:srgbClr val="222222"/>
                 </a:solidFill>
@@ -4883,7 +4883,7 @@
           <a:p>
             <a:pPr/>
             <a:r>
-              <a:rPr sz="2200" b="0">
+              <a:rPr sz="2000" b="0">
                 <a:solidFill>
                   <a:srgbClr val="222222"/>
                 </a:solidFill>
@@ -4895,7 +4895,7 @@
           <a:p>
             <a:pPr/>
             <a:r>
-              <a:rPr sz="2200" b="0">
+              <a:rPr sz="2000" b="0">
                 <a:solidFill>
                   <a:srgbClr val="222222"/>
                 </a:solidFill>
@@ -4990,7 +4990,7 @@
           <a:p>
             <a:pPr/>
             <a:r>
-              <a:rPr sz="2200" b="0">
+              <a:rPr sz="2000" b="0">
                 <a:solidFill>
                   <a:srgbClr val="222222"/>
                 </a:solidFill>
@@ -5002,7 +5002,7 @@
           <a:p>
             <a:pPr/>
             <a:r>
-              <a:rPr sz="2200" b="0">
+              <a:rPr sz="2000" b="0">
                 <a:solidFill>
                   <a:srgbClr val="222222"/>
                 </a:solidFill>
@@ -5014,7 +5014,7 @@
           <a:p>
             <a:pPr/>
             <a:r>
-              <a:rPr sz="2200" b="0">
+              <a:rPr sz="2000" b="0">
                 <a:solidFill>
                   <a:srgbClr val="222222"/>
                 </a:solidFill>
@@ -5026,7 +5026,7 @@
           <a:p>
             <a:pPr/>
             <a:r>
-              <a:rPr sz="2200" b="0">
+              <a:rPr sz="2000" b="0">
                 <a:solidFill>
                   <a:srgbClr val="222222"/>
                 </a:solidFill>
@@ -5121,7 +5121,7 @@
           <a:p>
             <a:pPr/>
             <a:r>
-              <a:rPr sz="2200" b="0">
+              <a:rPr sz="2000" b="0">
                 <a:solidFill>
                   <a:srgbClr val="222222"/>
                 </a:solidFill>
@@ -5133,7 +5133,7 @@
           <a:p>
             <a:pPr/>
             <a:r>
-              <a:rPr sz="2200" b="0">
+              <a:rPr sz="2000" b="0">
                 <a:solidFill>
                   <a:srgbClr val="222222"/>
                 </a:solidFill>
@@ -5145,7 +5145,7 @@
           <a:p>
             <a:pPr/>
             <a:r>
-              <a:rPr sz="2200" b="0">
+              <a:rPr sz="2000" b="0">
                 <a:solidFill>
                   <a:srgbClr val="222222"/>
                 </a:solidFill>
@@ -5157,7 +5157,7 @@
           <a:p>
             <a:pPr/>
             <a:r>
-              <a:rPr sz="2200" b="0">
+              <a:rPr sz="2000" b="0">
                 <a:solidFill>
                   <a:srgbClr val="222222"/>
                 </a:solidFill>
@@ -5169,7 +5169,7 @@
           <a:p>
             <a:pPr/>
             <a:r>
-              <a:rPr sz="2200" b="0">
+              <a:rPr sz="2000" b="0">
                 <a:solidFill>
                   <a:srgbClr val="222222"/>
                 </a:solidFill>
@@ -5264,7 +5264,7 @@
           <a:p>
             <a:pPr/>
             <a:r>
-              <a:rPr sz="2200" b="0">
+              <a:rPr sz="2000" b="0">
                 <a:solidFill>
                   <a:srgbClr val="222222"/>
                 </a:solidFill>
@@ -5276,7 +5276,7 @@
           <a:p>
             <a:pPr/>
             <a:r>
-              <a:rPr sz="2200" b="0">
+              <a:rPr sz="2000" b="0">
                 <a:solidFill>
                   <a:srgbClr val="222222"/>
                 </a:solidFill>
@@ -5288,7 +5288,7 @@
           <a:p>
             <a:pPr/>
             <a:r>
-              <a:rPr sz="2200" b="0">
+              <a:rPr sz="2000" b="0">
                 <a:solidFill>
                   <a:srgbClr val="222222"/>
                 </a:solidFill>
@@ -5300,7 +5300,7 @@
           <a:p>
             <a:pPr/>
             <a:r>
-              <a:rPr sz="2200" b="0">
+              <a:rPr sz="2000" b="0">
                 <a:solidFill>
                   <a:srgbClr val="222222"/>
                 </a:solidFill>
@@ -5312,7 +5312,7 @@
           <a:p>
             <a:pPr/>
             <a:r>
-              <a:rPr sz="2200" b="0">
+              <a:rPr sz="2000" b="0">
                 <a:solidFill>
                   <a:srgbClr val="222222"/>
                 </a:solidFill>
